--- a/00 - perki-docs/05 - OUTPUTS/Perki-Pitch-Deck.pptx
+++ b/00 - perki-docs/05 - OUTPUTS/Perki-Pitch-Deck.pptx
@@ -10,10 +10,10 @@
     <p:sldId id="258" r:id="rId4"/>
     <p:sldId id="259" r:id="rId5"/>
     <p:sldId id="260" r:id="rId6"/>
-    <p:sldId id="261" r:id="rId7"/>
     <p:sldId id="262" r:id="rId8"/>
     <p:sldId id="263" r:id="rId9"/>
     <p:sldId id="264" r:id="rId10"/>
+    <p:sldId id="271" r:id="rId22"/>
     <p:sldId id="265" r:id="rId11"/>
     <p:sldId id="266" r:id="rId12"/>
     <p:sldId id="267" r:id="rId13"/>
@@ -1420,94 +1420,6 @@
             <a:fld id="{F7021451-1387-4CA6-816F-3879F97B5CBC}" type="slidenum">
               <a:rPr lang="en-US"/>
               <a:t>5</a:t>
-            </a:fld>
-            <a:endParaRPr lang="en-US"/>
-          </a:p>
-        </p:txBody>
-      </p:sp>
-    </p:spTree>
-    <p:extLst>
-      <p:ext uri="{BB962C8B-B14F-4D97-AF65-F5344CB8AC3E}">
-        <p14:creationId xmlns:p14="http://schemas.microsoft.com/office/powerpoint/2010/main" val="1024086991"/>
-      </p:ext>
-    </p:extLst>
-  </p:cSld>
-  <p:clrMapOvr>
-    <a:masterClrMapping/>
-  </p:clrMapOvr>
-</p:notes>
-</file>
-
-<file path=ppt/notesSlides/notesSlide6.xml><?xml version="1.0" encoding="utf-8"?>
-<p:notes xmlns:a="http://schemas.openxmlformats.org/drawingml/2006/main" xmlns:r="http://schemas.openxmlformats.org/officeDocument/2006/relationships" xmlns:p="http://schemas.openxmlformats.org/presentationml/2006/main">
-  <p:cSld>
-    <p:spTree>
-      <p:nvGrpSpPr>
-        <p:cNvPr id="1" name=""/>
-        <p:cNvGrpSpPr/>
-        <p:nvPr/>
-      </p:nvGrpSpPr>
-      <p:grpSpPr>
-        <a:xfrm>
-          <a:off x="0" y="0"/>
-          <a:ext cx="0" cy="0"/>
-          <a:chOff x="0" y="0"/>
-          <a:chExt cx="0" cy="0"/>
-        </a:xfrm>
-      </p:grpSpPr>
-      <p:sp>
-        <p:nvSpPr>
-          <p:cNvPr id="2" name="Slide Image Placeholder 1"/>
-          <p:cNvSpPr>
-            <a:spLocks noGrp="1" noRot="1" noChangeAspect="1"/>
-          </p:cNvSpPr>
-          <p:nvPr>
-            <p:ph type="sldImg"/>
-          </p:nvPr>
-        </p:nvSpPr>
-        <p:spPr/>
-      </p:sp>
-      <p:sp>
-        <p:nvSpPr>
-          <p:cNvPr id="3" name="Notes Placeholder 2"/>
-          <p:cNvSpPr>
-            <a:spLocks noGrp="1"/>
-          </p:cNvSpPr>
-          <p:nvPr>
-            <p:ph type="body" idx="1"/>
-          </p:nvPr>
-        </p:nvSpPr>
-        <p:spPr/>
-        <p:txBody>
-          <a:bodyPr/>
-          <a:lstStyle/>
-          <a:p>
-            <a:r>
-              <a:rPr lang="en-US" dirty="0"/>
-              <a:t/>
-            </a:r>
-            <a:endParaRPr lang="en-US" dirty="0"/>
-          </a:p>
-        </p:txBody>
-      </p:sp>
-      <p:sp>
-        <p:nvSpPr>
-          <p:cNvPr id="4" name="Slide Number Placeholder 3"/>
-          <p:cNvSpPr>
-            <a:spLocks noGrp="1"/>
-          </p:cNvSpPr>
-          <p:nvPr>
-            <p:ph type="sldNum" sz="quarter" idx="10"/>
-          </p:nvPr>
-        </p:nvSpPr>
-        <p:spPr/>
-        <p:txBody>
-          <a:bodyPr/>
-          <a:lstStyle/>
-          <a:p>
-            <a:fld id="{F7021451-1387-4CA6-816F-3879F97B5CBC}" type="slidenum">
-              <a:rPr lang="en-US"/>
-              <a:t>6</a:t>
             </a:fld>
             <a:endParaRPr lang="en-US"/>
           </a:p>
@@ -2510,6 +2422,10 @@
             </a:outerShdw>
           </a:effectLst>
         </p:spPr>
+        <p:txBody>
+          <a:bodyPr/>
+          <a:p/>
+        </p:txBody>
       </p:sp>
       <p:sp>
         <p:nvSpPr>
@@ -2661,6 +2577,10 @@
             </a:outerShdw>
           </a:effectLst>
         </p:spPr>
+        <p:txBody>
+          <a:bodyPr/>
+          <a:p/>
+        </p:txBody>
       </p:sp>
       <p:sp>
         <p:nvSpPr>
@@ -2812,6 +2732,10 @@
             </a:outerShdw>
           </a:effectLst>
         </p:spPr>
+        <p:txBody>
+          <a:bodyPr/>
+          <a:p/>
+        </p:txBody>
       </p:sp>
       <p:sp>
         <p:nvSpPr>
@@ -3375,6 +3299,10 @@
             </a:outerShdw>
           </a:effectLst>
         </p:spPr>
+        <p:txBody>
+          <a:bodyPr/>
+          <a:p/>
+        </p:txBody>
       </p:sp>
       <p:sp>
         <p:nvSpPr>
@@ -3490,6 +3418,10 @@
             </a:outerShdw>
           </a:effectLst>
         </p:spPr>
+        <p:txBody>
+          <a:bodyPr/>
+          <a:p/>
+        </p:txBody>
       </p:sp>
       <p:sp>
         <p:nvSpPr>
@@ -3605,6 +3537,10 @@
             </a:outerShdw>
           </a:effectLst>
         </p:spPr>
+        <p:txBody>
+          <a:bodyPr/>
+          <a:p/>
+        </p:txBody>
       </p:sp>
       <p:sp>
         <p:nvSpPr>
@@ -3720,6 +3656,10 @@
             </a:outerShdw>
           </a:effectLst>
         </p:spPr>
+        <p:txBody>
+          <a:bodyPr/>
+          <a:p/>
+        </p:txBody>
       </p:sp>
       <p:sp>
         <p:nvSpPr>
@@ -3799,6 +3739,50 @@
               <a:t>Identity, logo, design system and voice, ready to scale.</a:t>
             </a:r>
             <a:endParaRPr lang="en-US" sz="1350" dirty="0"/>
+          </a:p>
+        </p:txBody>
+      </p:sp>
+      <p:sp>
+        <p:nvSpPr>
+          <p:cNvPr id="18" name="TextBox 17"/>
+          <p:cNvSpPr txBox="1"/>
+          <p:nvPr/>
+        </p:nvSpPr>
+        <p:spPr>
+          <a:xfrm>
+            <a:off x="822960" y="5669280"/>
+            <a:ext cx="10515600" cy="365760"/>
+          </a:xfrm>
+          <a:prstGeom prst="rect">
+            <a:avLst/>
+          </a:prstGeom>
+          <a:noFill/>
+        </p:spPr>
+        <p:txBody>
+          <a:bodyPr wrap="square" lIns="0" rIns="0" tIns="0" bIns="0">
+            <a:spAutoFit/>
+          </a:bodyPr>
+          <a:lstStyle/>
+          <a:p>
+            <a:r>
+              <a:rPr sz="1300">
+                <a:solidFill>
+                  <a:srgbClr val="6B6757"/>
+                </a:solidFill>
+                <a:latin typeface="Work Sans"/>
+              </a:rPr>
+              <a:t>Live now at </a:t>
+            </a:r>
+            <a:r>
+              <a:rPr sz="1300" b="1">
+                <a:solidFill>
+                  <a:srgbClr val="B07C1A"/>
+                </a:solidFill>
+                <a:latin typeface="Work Sans"/>
+                <a:hlinkClick r:id="rId4"/>
+              </a:rPr>
+              <a:t>perki-app.vercel.app</a:t>
+            </a:r>
           </a:p>
         </p:txBody>
       </p:sp>
@@ -4008,6 +3992,10 @@
             </a:outerShdw>
           </a:effectLst>
         </p:spPr>
+        <p:txBody>
+          <a:bodyPr/>
+          <a:p/>
+        </p:txBody>
       </p:sp>
       <p:sp>
         <p:nvSpPr>
@@ -4123,6 +4111,10 @@
             </a:outerShdw>
           </a:effectLst>
         </p:spPr>
+        <p:txBody>
+          <a:bodyPr/>
+          <a:p/>
+        </p:txBody>
       </p:sp>
       <p:sp>
         <p:nvSpPr>
@@ -4238,6 +4230,10 @@
             </a:outerShdw>
           </a:effectLst>
         </p:spPr>
+        <p:txBody>
+          <a:bodyPr/>
+          <a:p/>
+        </p:txBody>
       </p:sp>
       <p:sp>
         <p:nvSpPr>
@@ -4526,6 +4522,10 @@
             </a:outerShdw>
           </a:effectLst>
         </p:spPr>
+        <p:txBody>
+          <a:bodyPr/>
+          <a:p/>
+        </p:txBody>
       </p:sp>
       <p:sp>
         <p:nvSpPr>
@@ -4546,6 +4546,10 @@
           </a:solidFill>
           <a:ln/>
         </p:spPr>
+        <p:txBody>
+          <a:bodyPr/>
+          <a:p/>
+        </p:txBody>
       </p:sp>
       <p:sp>
         <p:nvSpPr>
@@ -4717,6 +4721,76 @@
               <a:t>Technical lead to build API capability.   Analyst to expand the catalogue.</a:t>
             </a:r>
             <a:endParaRPr lang="en-US" sz="1450" dirty="0"/>
+          </a:p>
+        </p:txBody>
+      </p:sp>
+      <p:sp>
+        <p:nvSpPr>
+          <p:cNvPr id="12" name="TextBox 11"/>
+          <p:cNvSpPr txBox="1"/>
+          <p:nvPr/>
+        </p:nvSpPr>
+        <p:spPr>
+          <a:xfrm>
+            <a:off x="822960" y="4983480"/>
+            <a:ext cx="10515600" cy="274320"/>
+          </a:xfrm>
+          <a:prstGeom prst="rect">
+            <a:avLst/>
+          </a:prstGeom>
+          <a:noFill/>
+        </p:spPr>
+        <p:txBody>
+          <a:bodyPr wrap="square" lIns="0" rIns="0" tIns="0" bIns="0" anchor="t">
+            <a:spAutoFit/>
+          </a:bodyPr>
+          <a:lstStyle/>
+          <a:p>
+            <a:pPr algn="l"/>
+            <a:r>
+              <a:rPr sz="1100" b="1">
+                <a:solidFill>
+                  <a:srgbClr val="B07C1A"/>
+                </a:solidFill>
+                <a:latin typeface="Outfit"/>
+              </a:rPr>
+              <a:t>THE ORIGIN</a:t>
+            </a:r>
+          </a:p>
+        </p:txBody>
+      </p:sp>
+      <p:sp>
+        <p:nvSpPr>
+          <p:cNvPr id="13" name="TextBox 12"/>
+          <p:cNvSpPr txBox="1"/>
+          <p:nvPr/>
+        </p:nvSpPr>
+        <p:spPr>
+          <a:xfrm>
+            <a:off x="822960" y="5285232"/>
+            <a:ext cx="10515600" cy="960120"/>
+          </a:xfrm>
+          <a:prstGeom prst="rect">
+            <a:avLst/>
+          </a:prstGeom>
+          <a:noFill/>
+        </p:spPr>
+        <p:txBody>
+          <a:bodyPr wrap="square" lIns="0" rIns="0" tIns="0" bIns="0" anchor="t">
+            <a:spAutoFit/>
+          </a:bodyPr>
+          <a:lstStyle/>
+          <a:p>
+            <a:pPr algn="l"/>
+            <a:r>
+              <a:rPr sz="1250" b="0">
+                <a:solidFill>
+                  <a:srgbClr val="23202A"/>
+                </a:solidFill>
+                <a:latin typeface="Work Sans"/>
+              </a:rPr>
+              <a:t>Perki began at an airport gate, hunting through a jumble of memberships, cards and perks to work out which lounge I could actually use. Bouncing between apps, emails and websites to remember my tier and what I was owed, it struck me as absurd that nothing simply told me what I get. Tired and annoyed, that is where Perki was born: one place to see every perk, benefit, discount and feature you already pay for, and to make sure you actually use them.</a:t>
+            </a:r>
           </a:p>
         </p:txBody>
       </p:sp>
@@ -5158,6 +5232,10 @@
             </a:outerShdw>
           </a:effectLst>
         </p:spPr>
+        <p:txBody>
+          <a:bodyPr/>
+          <a:p/>
+        </p:txBody>
       </p:sp>
       <p:sp>
         <p:nvSpPr>
@@ -5273,6 +5351,10 @@
             </a:outerShdw>
           </a:effectLst>
         </p:spPr>
+        <p:txBody>
+          <a:bodyPr/>
+          <a:p/>
+        </p:txBody>
       </p:sp>
       <p:sp>
         <p:nvSpPr>
@@ -5388,6 +5470,10 @@
             </a:outerShdw>
           </a:effectLst>
         </p:spPr>
+        <p:txBody>
+          <a:bodyPr/>
+          <a:p/>
+        </p:txBody>
       </p:sp>
       <p:sp>
         <p:nvSpPr>
@@ -5715,6 +5801,10 @@
             </a:outerShdw>
           </a:effectLst>
         </p:spPr>
+        <p:txBody>
+          <a:bodyPr/>
+          <a:p/>
+        </p:txBody>
       </p:sp>
       <p:sp>
         <p:nvSpPr>
@@ -5830,6 +5920,10 @@
             </a:outerShdw>
           </a:effectLst>
         </p:spPr>
+        <p:txBody>
+          <a:bodyPr/>
+          <a:p/>
+        </p:txBody>
       </p:sp>
       <p:sp>
         <p:nvSpPr>
@@ -5945,6 +6039,10 @@
             </a:outerShdw>
           </a:effectLst>
         </p:spPr>
+        <p:txBody>
+          <a:bodyPr/>
+          <a:p/>
+        </p:txBody>
       </p:sp>
       <p:sp>
         <p:nvSpPr>
@@ -6528,6 +6626,10 @@
             </a:outerShdw>
           </a:effectLst>
         </p:spPr>
+        <p:txBody>
+          <a:bodyPr/>
+          <a:p/>
+        </p:txBody>
       </p:sp>
       <p:sp>
         <p:nvSpPr>
@@ -6643,6 +6745,10 @@
             </a:outerShdw>
           </a:effectLst>
         </p:spPr>
+        <p:txBody>
+          <a:bodyPr/>
+          <a:p/>
+        </p:txBody>
       </p:sp>
       <p:sp>
         <p:nvSpPr>
@@ -6758,6 +6864,10 @@
             </a:outerShdw>
           </a:effectLst>
         </p:spPr>
+        <p:txBody>
+          <a:bodyPr/>
+          <a:p/>
+        </p:txBody>
       </p:sp>
       <p:sp>
         <p:nvSpPr>
@@ -6873,6 +6983,10 @@
             </a:outerShdw>
           </a:effectLst>
         </p:spPr>
+        <p:txBody>
+          <a:bodyPr/>
+          <a:p/>
+        </p:txBody>
       </p:sp>
       <p:sp>
         <p:nvSpPr>
@@ -7011,203 +7125,6 @@
 </file>
 
 <file path=ppt/slides/slide6.xml><?xml version="1.0" encoding="utf-8"?>
-<p:sld xmlns:a="http://schemas.openxmlformats.org/drawingml/2006/main" xmlns:r="http://schemas.openxmlformats.org/officeDocument/2006/relationships" xmlns:p="http://schemas.openxmlformats.org/presentationml/2006/main">
-  <p:cSld name="Slide 6">
-    <p:bg>
-      <p:bgPr>
-        <a:solidFill>
-          <a:srgbClr val="F4F0E6"/>
-        </a:solidFill>
-      </p:bgPr>
-    </p:bg>
-    <p:spTree>
-      <p:nvGrpSpPr>
-        <p:cNvPr id="1" name=""/>
-        <p:cNvGrpSpPr/>
-        <p:nvPr/>
-      </p:nvGrpSpPr>
-      <p:grpSpPr>
-        <a:xfrm>
-          <a:off x="0" y="0"/>
-          <a:ext cx="0" cy="0"/>
-          <a:chOff x="0" y="0"/>
-          <a:chExt cx="0" cy="0"/>
-        </a:xfrm>
-      </p:grpSpPr>
-      <p:sp>
-        <p:nvSpPr>
-          <p:cNvPr id="2" name="Text 0"/>
-          <p:cNvSpPr/>
-          <p:nvPr/>
-        </p:nvSpPr>
-        <p:spPr>
-          <a:xfrm>
-            <a:off x="822960" y="566928"/>
-            <a:ext cx="10058400" cy="274320"/>
-          </a:xfrm>
-          <a:prstGeom prst="rect">
-            <a:avLst/>
-          </a:prstGeom>
-          <a:noFill/>
-          <a:ln/>
-        </p:spPr>
-        <p:txBody>
-          <a:bodyPr wrap="square" lIns="0" tIns="0" rIns="0" bIns="0" rtlCol="0" anchor="ctr"/>
-          <a:lstStyle/>
-          <a:p>
-            <a:pPr indent="0" marL="0">
-              <a:buNone/>
-            </a:pPr>
-            <a:r>
-              <a:rPr lang="en-US" sz="1200" b="1" spc="300" kern="0" dirty="0">
-                <a:solidFill>
-                  <a:srgbClr val="B07C1A"/>
-                </a:solidFill>
-                <a:latin typeface="Outfit" pitchFamily="34" charset="0"/>
-                <a:ea typeface="Outfit" pitchFamily="34" charset="-122"/>
-                <a:cs typeface="Outfit" pitchFamily="34" charset="-120"/>
-              </a:rPr>
-              <a:t>THE OPPORTUNITY</a:t>
-            </a:r>
-            <a:endParaRPr lang="en-US" sz="1200" dirty="0"/>
-          </a:p>
-        </p:txBody>
-      </p:sp>
-      <p:sp>
-        <p:nvSpPr>
-          <p:cNvPr id="3" name="Text 1"/>
-          <p:cNvSpPr/>
-          <p:nvPr/>
-        </p:nvSpPr>
-        <p:spPr>
-          <a:xfrm>
-            <a:off x="822960" y="868680"/>
-            <a:ext cx="10515600" cy="914400"/>
-          </a:xfrm>
-          <a:prstGeom prst="rect">
-            <a:avLst/>
-          </a:prstGeom>
-          <a:noFill/>
-          <a:ln/>
-        </p:spPr>
-        <p:txBody>
-          <a:bodyPr wrap="square" lIns="0" tIns="0" rIns="0" bIns="0" rtlCol="0" anchor="ctr"/>
-          <a:lstStyle/>
-          <a:p>
-            <a:pPr indent="0" marL="0">
-              <a:buNone/>
-            </a:pPr>
-            <a:r>
-              <a:rPr lang="en-US" sz="3100" b="1" dirty="0">
-                <a:solidFill>
-                  <a:srgbClr val="23202A"/>
-                </a:solidFill>
-                <a:latin typeface="Outfit" pitchFamily="34" charset="0"/>
-                <a:ea typeface="Outfit" pitchFamily="34" charset="-122"/>
-                <a:cs typeface="Outfit" pitchFamily="34" charset="-120"/>
-              </a:rPr>
-              <a:t>A multi-billion pound market with an empty corner.</a:t>
-            </a:r>
-            <a:endParaRPr lang="en-US" sz="3100" dirty="0"/>
-          </a:p>
-        </p:txBody>
-      </p:sp>
-      <p:pic>
-        <p:nvPicPr>
-          <p:cNvPr id="4" name="Image 0" descr="preencoded.png">    </p:cNvPr>
-          <p:cNvPicPr>
-            <a:picLocks noChangeAspect="1"/>
-          </p:cNvPicPr>
-          <p:nvPr/>
-        </p:nvPicPr>
-        <p:blipFill>
-          <a:blip r:embed="rId1"/>
-          <a:stretch>
-            <a:fillRect/>
-          </a:stretch>
-        </p:blipFill>
-        <p:spPr>
-          <a:xfrm>
-            <a:off x="11292840" y="457200"/>
-            <a:ext cx="502920" cy="502920"/>
-          </a:xfrm>
-          <a:prstGeom prst="rect">
-            <a:avLst/>
-          </a:prstGeom>
-        </p:spPr>
-      </p:pic>
-      <p:sp>
-        <p:nvSpPr>
-          <p:cNvPr id="5" name="Text 2"/>
-          <p:cNvSpPr/>
-          <p:nvPr/>
-        </p:nvSpPr>
-        <p:spPr>
-          <a:xfrm>
-            <a:off x="11338560" y="6355080"/>
-            <a:ext cx="457200" cy="274320"/>
-          </a:xfrm>
-          <a:prstGeom prst="rect">
-            <a:avLst/>
-          </a:prstGeom>
-          <a:noFill/>
-          <a:ln/>
-        </p:spPr>
-        <p:txBody>
-          <a:bodyPr wrap="square" lIns="0" tIns="0" rIns="0" bIns="0" rtlCol="0" anchor="ctr"/>
-          <a:lstStyle/>
-          <a:p>
-            <a:pPr algn="r" indent="0" marL="0">
-              <a:buNone/>
-            </a:pPr>
-            <a:r>
-              <a:rPr lang="en-US" sz="1000" dirty="0">
-                <a:solidFill>
-                  <a:srgbClr val="6B6757"/>
-                </a:solidFill>
-                <a:latin typeface="Work Sans" pitchFamily="34" charset="0"/>
-                <a:ea typeface="Work Sans" pitchFamily="34" charset="-122"/>
-                <a:cs typeface="Work Sans" pitchFamily="34" charset="-120"/>
-              </a:rPr>
-              <a:t>6</a:t>
-            </a:r>
-            <a:endParaRPr lang="en-US" sz="1000" dirty="0"/>
-          </a:p>
-        </p:txBody>
-      </p:sp>
-      <p:pic>
-        <p:nvPicPr>
-          <p:cNvPr id="6" name="Image 1" descr="preencoded.png">    </p:cNvPr>
-          <p:cNvPicPr>
-            <a:picLocks noChangeAspect="1"/>
-          </p:cNvPicPr>
-          <p:nvPr/>
-        </p:nvPicPr>
-        <p:blipFill>
-          <a:blip r:embed="rId2"/>
-          <a:stretch>
-            <a:fillRect/>
-          </a:stretch>
-        </p:blipFill>
-        <p:spPr>
-          <a:xfrm>
-            <a:off x="822960" y="1880000"/>
-            <a:ext cx="10515600" cy="4766272"/>
-          </a:xfrm>
-          <a:prstGeom prst="rect">
-            <a:avLst/>
-          </a:prstGeom>
-        </p:spPr>
-      </p:pic>
-    </p:spTree>
-  </p:cSld>
-  <p:clrMapOvr>
-    <a:masterClrMapping/>
-  </p:clrMapOvr>
-</p:sld>
-</file>
-
-<file path=ppt/slides/slide7.xml><?xml version="1.0" encoding="utf-8"?>
 <p:sld xmlns:a="http://schemas.openxmlformats.org/drawingml/2006/main" xmlns:r="http://schemas.openxmlformats.org/officeDocument/2006/relationships" xmlns:p="http://schemas.openxmlformats.org/presentationml/2006/main">
   <p:cSld name="Slide 7">
     <p:bg>
@@ -7366,7 +7283,7 @@
                 <a:ea typeface="Work Sans" pitchFamily="34" charset="-122"/>
                 <a:cs typeface="Work Sans" pitchFamily="34" charset="-120"/>
               </a:rPr>
-              <a:t>7</a:t>
+              <a:t>6</a:t>
             </a:r>
             <a:endParaRPr lang="en-US" sz="1000" dirty="0"/>
           </a:p>
@@ -7405,6 +7322,10 @@
             </a:outerShdw>
           </a:effectLst>
         </p:spPr>
+        <p:txBody>
+          <a:bodyPr/>
+          <a:p/>
+        </p:txBody>
       </p:sp>
       <p:sp>
         <p:nvSpPr>
@@ -7430,6 +7351,10 @@
             <a:prstDash val="solid"/>
           </a:ln>
         </p:spPr>
+        <p:txBody>
+          <a:bodyPr/>
+          <a:p/>
+        </p:txBody>
       </p:sp>
       <p:sp>
         <p:nvSpPr>
@@ -7584,6 +7509,10 @@
             </a:outerShdw>
           </a:effectLst>
         </p:spPr>
+        <p:txBody>
+          <a:bodyPr/>
+          <a:p/>
+        </p:txBody>
       </p:sp>
       <p:sp>
         <p:nvSpPr>
@@ -7609,6 +7538,10 @@
             <a:prstDash val="solid"/>
           </a:ln>
         </p:spPr>
+        <p:txBody>
+          <a:bodyPr/>
+          <a:p/>
+        </p:txBody>
       </p:sp>
       <p:sp>
         <p:nvSpPr>
@@ -7763,6 +7696,10 @@
             </a:outerShdw>
           </a:effectLst>
         </p:spPr>
+        <p:txBody>
+          <a:bodyPr/>
+          <a:p/>
+        </p:txBody>
       </p:sp>
       <p:sp>
         <p:nvSpPr>
@@ -7788,6 +7725,10 @@
             <a:prstDash val="solid"/>
           </a:ln>
         </p:spPr>
+        <p:txBody>
+          <a:bodyPr/>
+          <a:p/>
+        </p:txBody>
       </p:sp>
       <p:sp>
         <p:nvSpPr>
@@ -7917,7 +7858,7 @@
 </p:sld>
 </file>
 
-<file path=ppt/slides/slide8.xml><?xml version="1.0" encoding="utf-8"?>
+<file path=ppt/slides/slide7.xml><?xml version="1.0" encoding="utf-8"?>
 <p:sld xmlns:a="http://schemas.openxmlformats.org/drawingml/2006/main" xmlns:r="http://schemas.openxmlformats.org/officeDocument/2006/relationships" xmlns:p="http://schemas.openxmlformats.org/presentationml/2006/main">
   <p:cSld name="Slide 8">
     <p:bg>
@@ -8076,7 +8017,7 @@
                 <a:ea typeface="Work Sans" pitchFamily="34" charset="-122"/>
                 <a:cs typeface="Work Sans" pitchFamily="34" charset="-120"/>
               </a:rPr>
-              <a:t>8</a:t>
+              <a:t>7</a:t>
             </a:r>
             <a:endParaRPr lang="en-US" sz="1000" dirty="0"/>
           </a:p>
@@ -8157,6 +8098,10 @@
             </a:outerShdw>
           </a:effectLst>
         </p:spPr>
+        <p:txBody>
+          <a:bodyPr/>
+          <a:p/>
+        </p:txBody>
       </p:sp>
       <p:sp>
         <p:nvSpPr>
@@ -8357,6 +8302,10 @@
             </a:outerShdw>
           </a:effectLst>
         </p:spPr>
+        <p:txBody>
+          <a:bodyPr/>
+          <a:p/>
+        </p:txBody>
       </p:sp>
       <p:sp>
         <p:nvSpPr>
@@ -8447,7 +8396,7 @@
 </p:sld>
 </file>
 
-<file path=ppt/slides/slide9.xml><?xml version="1.0" encoding="utf-8"?>
+<file path=ppt/slides/slide8.xml><?xml version="1.0" encoding="utf-8"?>
 <p:sld xmlns:a="http://schemas.openxmlformats.org/drawingml/2006/main" xmlns:r="http://schemas.openxmlformats.org/officeDocument/2006/relationships" xmlns:p="http://schemas.openxmlformats.org/presentationml/2006/main">
   <p:cSld name="Slide 9">
     <p:bg>
@@ -8606,7 +8555,7 @@
                 <a:ea typeface="Work Sans" pitchFamily="34" charset="-122"/>
                 <a:cs typeface="Work Sans" pitchFamily="34" charset="-120"/>
               </a:rPr>
-              <a:t>9</a:t>
+              <a:t>8</a:t>
             </a:r>
             <a:endParaRPr lang="en-US" sz="1000" dirty="0"/>
           </a:p>
@@ -8687,6 +8636,10 @@
             </a:outerShdw>
           </a:effectLst>
         </p:spPr>
+        <p:txBody>
+          <a:bodyPr/>
+          <a:p/>
+        </p:txBody>
       </p:sp>
       <p:sp>
         <p:nvSpPr>
@@ -8802,6 +8755,10 @@
             </a:outerShdw>
           </a:effectLst>
         </p:spPr>
+        <p:txBody>
+          <a:bodyPr/>
+          <a:p/>
+        </p:txBody>
       </p:sp>
       <p:sp>
         <p:nvSpPr>
@@ -8917,6 +8874,10 @@
             </a:outerShdw>
           </a:effectLst>
         </p:spPr>
+        <p:txBody>
+          <a:bodyPr/>
+          <a:p/>
+        </p:txBody>
       </p:sp>
       <p:sp>
         <p:nvSpPr>
@@ -9032,6 +8993,10 @@
             </a:outerShdw>
           </a:effectLst>
         </p:spPr>
+        <p:txBody>
+          <a:bodyPr/>
+          <a:p/>
+        </p:txBody>
       </p:sp>
       <p:sp>
         <p:nvSpPr>
@@ -9111,6 +9076,348 @@
               <a:t>A running score of money still on the table.</a:t>
             </a:r>
             <a:endParaRPr lang="en-US" sz="1350" dirty="0"/>
+          </a:p>
+        </p:txBody>
+      </p:sp>
+    </p:spTree>
+  </p:cSld>
+  <p:clrMapOvr>
+    <a:masterClrMapping/>
+  </p:clrMapOvr>
+</p:sld>
+</file>
+
+<file path=ppt/slides/slide9.xml><?xml version="1.0" encoding="utf-8"?>
+<p:sld xmlns:a="http://schemas.openxmlformats.org/drawingml/2006/main" xmlns:p="http://schemas.openxmlformats.org/presentationml/2006/main" xmlns:r="http://schemas.openxmlformats.org/officeDocument/2006/relationships">
+  <p:cSld>
+    <p:bg>
+      <p:bgPr>
+        <a:solidFill>
+          <a:srgbClr val="F4F0E6"/>
+        </a:solidFill>
+        <a:effectLst/>
+      </p:bgPr>
+    </p:bg>
+    <p:spTree>
+      <p:nvGrpSpPr>
+        <p:cNvPr id="1" name=""/>
+        <p:cNvGrpSpPr/>
+        <p:nvPr/>
+      </p:nvGrpSpPr>
+      <p:grpSpPr/>
+      <p:sp>
+        <p:nvSpPr>
+          <p:cNvPr id="2" name="TextBox 1"/>
+          <p:cNvSpPr txBox="1"/>
+          <p:nvPr/>
+        </p:nvSpPr>
+        <p:spPr>
+          <a:xfrm>
+            <a:off x="548640" y="411480"/>
+            <a:ext cx="10972800" cy="548640"/>
+          </a:xfrm>
+          <a:prstGeom prst="rect">
+            <a:avLst/>
+          </a:prstGeom>
+          <a:noFill/>
+        </p:spPr>
+        <p:txBody>
+          <a:bodyPr wrap="square" lIns="0" rIns="0" tIns="0" bIns="0" anchor="t">
+            <a:spAutoFit/>
+          </a:bodyPr>
+          <a:lstStyle/>
+          <a:p>
+            <a:pPr algn="l"/>
+            <a:r>
+              <a:rPr sz="3000" b="1">
+                <a:solidFill>
+                  <a:srgbClr val="23202A"/>
+                </a:solidFill>
+                <a:latin typeface="Outfit"/>
+              </a:rPr>
+              <a:t>See it in action</a:t>
+            </a:r>
+          </a:p>
+        </p:txBody>
+      </p:sp>
+      <p:sp>
+        <p:nvSpPr>
+          <p:cNvPr id="3" name="TextBox 2"/>
+          <p:cNvSpPr txBox="1"/>
+          <p:nvPr/>
+        </p:nvSpPr>
+        <p:spPr>
+          <a:xfrm>
+            <a:off x="548640" y="1005840"/>
+            <a:ext cx="10972800" cy="365760"/>
+          </a:xfrm>
+          <a:prstGeom prst="rect">
+            <a:avLst/>
+          </a:prstGeom>
+          <a:noFill/>
+        </p:spPr>
+        <p:txBody>
+          <a:bodyPr wrap="square" lIns="0" rIns="0" tIns="0" bIns="0" anchor="t">
+            <a:spAutoFit/>
+          </a:bodyPr>
+          <a:lstStyle/>
+          <a:p>
+            <a:pPr algn="l"/>
+            <a:r>
+              <a:rPr sz="1400" b="0">
+                <a:solidFill>
+                  <a:srgbClr val="6B6757"/>
+                </a:solidFill>
+                <a:latin typeface="Work Sans"/>
+              </a:rPr>
+              <a:t>Your daily 7am email, generated from your live perks.</a:t>
+            </a:r>
+          </a:p>
+        </p:txBody>
+      </p:sp>
+      <p:pic>
+        <p:nvPicPr>
+          <p:cNvPr id="4" name="Picture 3" descr="Screenshot 2026-06-09 173939.png"/>
+          <p:cNvPicPr>
+            <a:picLocks noChangeAspect="1"/>
+          </p:cNvPicPr>
+          <p:nvPr/>
+        </p:nvPicPr>
+        <p:blipFill>
+          <a:blip r:embed="rId2"/>
+          <a:stretch>
+            <a:fillRect/>
+          </a:stretch>
+        </p:blipFill>
+        <p:spPr>
+          <a:xfrm>
+            <a:off x="686495" y="1627632"/>
+            <a:ext cx="3148107" cy="3154680"/>
+          </a:xfrm>
+          <a:prstGeom prst="rect">
+            <a:avLst/>
+          </a:prstGeom>
+          <a:ln w="12700">
+            <a:solidFill>
+              <a:srgbClr val="E4DDCB"/>
+            </a:solidFill>
+          </a:ln>
+        </p:spPr>
+      </p:pic>
+      <p:sp>
+        <p:nvSpPr>
+          <p:cNvPr id="5" name="TextBox 4"/>
+          <p:cNvSpPr txBox="1"/>
+          <p:nvPr/>
+        </p:nvSpPr>
+        <p:spPr>
+          <a:xfrm>
+            <a:off x="548640" y="4910328"/>
+            <a:ext cx="3423818" cy="822960"/>
+          </a:xfrm>
+          <a:prstGeom prst="rect">
+            <a:avLst/>
+          </a:prstGeom>
+          <a:noFill/>
+        </p:spPr>
+        <p:txBody>
+          <a:bodyPr wrap="square" lIns="0" rIns="0" tIns="0" bIns="0" anchor="t">
+            <a:spAutoFit/>
+          </a:bodyPr>
+          <a:lstStyle/>
+          <a:p>
+            <a:pPr algn="l"/>
+            <a:r>
+              <a:rPr sz="1050" b="0">
+                <a:solidFill>
+                  <a:srgbClr val="6B6757"/>
+                </a:solidFill>
+                <a:latin typeface="Work Sans"/>
+              </a:rPr>
+              <a:t>The morning digest opens with your value at a glance: perks ready, what you have used, and your active memberships.</a:t>
+            </a:r>
+          </a:p>
+        </p:txBody>
+      </p:sp>
+      <p:pic>
+        <p:nvPicPr>
+          <p:cNvPr id="6" name="Picture 5" descr="Screenshot 2026-06-09 174201.png"/>
+          <p:cNvPicPr>
+            <a:picLocks noChangeAspect="1"/>
+          </p:cNvPicPr>
+          <p:nvPr/>
+        </p:nvPicPr>
+        <p:blipFill>
+          <a:blip r:embed="rId3"/>
+          <a:stretch>
+            <a:fillRect/>
+          </a:stretch>
+        </p:blipFill>
+        <p:spPr>
+          <a:xfrm>
+            <a:off x="4655734" y="1627632"/>
+            <a:ext cx="2880225" cy="3154680"/>
+          </a:xfrm>
+          <a:prstGeom prst="rect">
+            <a:avLst/>
+          </a:prstGeom>
+          <a:ln w="12700">
+            <a:solidFill>
+              <a:srgbClr val="E4DDCB"/>
+            </a:solidFill>
+          </a:ln>
+        </p:spPr>
+      </p:pic>
+      <p:sp>
+        <p:nvSpPr>
+          <p:cNvPr id="7" name="TextBox 6"/>
+          <p:cNvSpPr txBox="1"/>
+          <p:nvPr/>
+        </p:nvSpPr>
+        <p:spPr>
+          <a:xfrm>
+            <a:off x="4383938" y="4910328"/>
+            <a:ext cx="3423818" cy="822960"/>
+          </a:xfrm>
+          <a:prstGeom prst="rect">
+            <a:avLst/>
+          </a:prstGeom>
+          <a:noFill/>
+        </p:spPr>
+        <p:txBody>
+          <a:bodyPr wrap="square" lIns="0" rIns="0" tIns="0" bIns="0" anchor="t">
+            <a:spAutoFit/>
+          </a:bodyPr>
+          <a:lstStyle/>
+          <a:p>
+            <a:pPr algn="l"/>
+            <a:r>
+              <a:rPr sz="1050" b="0">
+                <a:solidFill>
+                  <a:srgbClr val="6B6757"/>
+                </a:solidFill>
+                <a:latin typeface="Work Sans"/>
+              </a:rPr>
+              <a:t>What to use today: time-sensitive perks with one-tap deep links, plus category shortcuts into the marketplace.</a:t>
+            </a:r>
+          </a:p>
+        </p:txBody>
+      </p:sp>
+      <p:pic>
+        <p:nvPicPr>
+          <p:cNvPr id="8" name="Picture 7" descr="Screenshot 2026-06-09 174232.png"/>
+          <p:cNvPicPr>
+            <a:picLocks noChangeAspect="1"/>
+          </p:cNvPicPr>
+          <p:nvPr/>
+        </p:nvPicPr>
+        <p:blipFill>
+          <a:blip r:embed="rId4"/>
+          <a:stretch>
+            <a:fillRect/>
+          </a:stretch>
+        </p:blipFill>
+        <p:spPr>
+          <a:xfrm>
+            <a:off x="8365859" y="1627632"/>
+            <a:ext cx="3130572" cy="3154680"/>
+          </a:xfrm>
+          <a:prstGeom prst="rect">
+            <a:avLst/>
+          </a:prstGeom>
+          <a:ln w="12700">
+            <a:solidFill>
+              <a:srgbClr val="E4DDCB"/>
+            </a:solidFill>
+          </a:ln>
+        </p:spPr>
+      </p:pic>
+      <p:sp>
+        <p:nvSpPr>
+          <p:cNvPr id="9" name="TextBox 8"/>
+          <p:cNvSpPr txBox="1"/>
+          <p:nvPr/>
+        </p:nvSpPr>
+        <p:spPr>
+          <a:xfrm>
+            <a:off x="8219236" y="4910328"/>
+            <a:ext cx="3423818" cy="822960"/>
+          </a:xfrm>
+          <a:prstGeom prst="rect">
+            <a:avLst/>
+          </a:prstGeom>
+          <a:noFill/>
+        </p:spPr>
+        <p:txBody>
+          <a:bodyPr wrap="square" lIns="0" rIns="0" tIns="0" bIns="0" anchor="t">
+            <a:spAutoFit/>
+          </a:bodyPr>
+          <a:lstStyle/>
+          <a:p>
+            <a:pPr algn="l"/>
+            <a:r>
+              <a:rPr sz="1050" b="0">
+                <a:solidFill>
+                  <a:srgbClr val="6B6757"/>
+                </a:solidFill>
+                <a:latin typeface="Work Sans"/>
+              </a:rPr>
+              <a:t>All your perks by category, each tagged Perk, Feature or Discount, with reset dates.</a:t>
+            </a:r>
+          </a:p>
+        </p:txBody>
+      </p:sp>
+      <p:sp>
+        <p:nvSpPr>
+          <p:cNvPr id="10" name="Rounded Rectangle 9"/>
+          <p:cNvSpPr/>
+          <p:nvPr/>
+        </p:nvSpPr>
+        <p:spPr>
+          <a:xfrm>
+            <a:off x="548640" y="5989320"/>
+            <a:ext cx="11094415" cy="621792"/>
+          </a:xfrm>
+          <a:prstGeom prst="roundRect">
+            <a:avLst/>
+          </a:prstGeom>
+          <a:solidFill>
+            <a:srgbClr val="F7ECD4"/>
+          </a:solidFill>
+          <a:ln w="12700">
+            <a:solidFill>
+              <a:srgbClr val="E0A93B"/>
+            </a:solidFill>
+          </a:ln>
+        </p:spPr>
+        <p:style>
+          <a:lnRef idx="1">
+            <a:schemeClr val="accent1"/>
+          </a:lnRef>
+          <a:fillRef idx="3">
+            <a:schemeClr val="accent1"/>
+          </a:fillRef>
+          <a:effectRef idx="2">
+            <a:schemeClr val="accent1"/>
+          </a:effectRef>
+          <a:fontRef idx="minor">
+            <a:schemeClr val="lt1"/>
+          </a:fontRef>
+        </p:style>
+        <p:txBody>
+          <a:bodyPr rtlCol="0" anchor="ctr"/>
+          <a:lstStyle/>
+          <a:p>
+            <a:pPr algn="ctr"/>
+            <a:r>
+              <a:rPr sz="1300" b="1">
+                <a:solidFill>
+                  <a:srgbClr val="B07C1A"/>
+                </a:solidFill>
+                <a:latin typeface="Outfit"/>
+              </a:rPr>
+              <a:t>Perki app · screenshots coming</a:t>
+            </a:r>
           </a:p>
         </p:txBody>
       </p:sp>
